--- a/decks/02-connectors-routines/2회차-커넥터-루틴-ComputerUse.pptx
+++ b/decks/02-connectors-routines/2회차-커넥터-루틴-ComputerUse.pptx
@@ -14074,7 +14074,7 @@
         <p:spPr>
           <a:xfrm>
             <a:off x="5294376" y="2240280"/>
-            <a:ext cx="4032504" cy="2468880"/>
+            <a:ext cx="4032504" cy="2017395"/>
           </a:xfrm>
           <a:prstGeom prst="rect">
             <a:avLst/>
@@ -14112,12 +14112,20 @@
               </a:rPr>
             </a:br>
             <a:r>
+              <a:rPr lang="ko-KR" altLang="en-US" sz="1600" dirty="0">
+                <a:latin typeface="Pretendard" pitchFamily="34" charset="0"/>
+                <a:ea typeface="Pretendard" pitchFamily="34" charset="-122"/>
+                <a:cs typeface="Pretendard" pitchFamily="34" charset="-120"/>
+              </a:rPr>
+              <a:t>예제</a:t>
+            </a:r>
+            <a:r>
               <a:rPr lang="en-US" altLang="ko-KR" sz="1600" dirty="0">
                 <a:latin typeface="Pretendard" pitchFamily="34" charset="0"/>
                 <a:ea typeface="Pretendard" pitchFamily="34" charset="-122"/>
                 <a:cs typeface="Pretendard" pitchFamily="34" charset="-120"/>
               </a:rPr>
-              <a:t>- </a:t>
+              <a:t> </a:t>
             </a:r>
             <a:r>
               <a:rPr lang="ko-KR" altLang="en-US" sz="1600" dirty="0">
@@ -14125,7 +14133,7 @@
                 <a:ea typeface="Pretendard" pitchFamily="34" charset="-122"/>
                 <a:cs typeface="Pretendard" pitchFamily="34" charset="-120"/>
               </a:rPr>
-              <a:t>주제에 맞는 신뢰도 높은 사이트 제공</a:t>
+              <a:t>참고하여 수행</a:t>
             </a:r>
             <a:br>
               <a:rPr lang="en-US" altLang="ko-KR" sz="1600" dirty="0">
@@ -14148,23 +14156,7 @@
                 <a:ea typeface="Pretendard" pitchFamily="34" charset="-122"/>
                 <a:cs typeface="Pretendard" pitchFamily="34" charset="-120"/>
               </a:rPr>
-              <a:t>시간</a:t>
-            </a:r>
-            <a:r>
-              <a:rPr lang="en-US" altLang="ko-KR" sz="1600" dirty="0">
-                <a:latin typeface="Pretendard" pitchFamily="34" charset="0"/>
-                <a:ea typeface="Pretendard" pitchFamily="34" charset="-122"/>
-                <a:cs typeface="Pretendard" pitchFamily="34" charset="-120"/>
-              </a:rPr>
-              <a:t>, </a:t>
-            </a:r>
-            <a:r>
-              <a:rPr lang="ko-KR" altLang="en-US" sz="1600" dirty="0">
-                <a:latin typeface="Pretendard" pitchFamily="34" charset="0"/>
-                <a:ea typeface="Pretendard" pitchFamily="34" charset="-122"/>
-                <a:cs typeface="Pretendard" pitchFamily="34" charset="-120"/>
-              </a:rPr>
-              <a:t>건수 등 제약 </a:t>
+              <a:t>주제에 맞는 신뢰도 높은 사이트 제공</a:t>
             </a:r>
             <a:br>
               <a:rPr lang="en-US" altLang="ko-KR" sz="1600" dirty="0">
@@ -14179,7 +14171,7 @@
                 <a:ea typeface="Pretendard" pitchFamily="34" charset="-122"/>
                 <a:cs typeface="Pretendard" pitchFamily="34" charset="-120"/>
               </a:rPr>
-              <a:t>- Slack</a:t>
+              <a:t>- </a:t>
             </a:r>
             <a:r>
               <a:rPr lang="ko-KR" altLang="en-US" sz="1600" dirty="0">
@@ -14187,7 +14179,7 @@
                 <a:ea typeface="Pretendard" pitchFamily="34" charset="-122"/>
                 <a:cs typeface="Pretendard" pitchFamily="34" charset="-120"/>
               </a:rPr>
-              <a:t>으로 발송 또는 </a:t>
+              <a:t>시간</a:t>
             </a:r>
             <a:r>
               <a:rPr lang="en-US" altLang="ko-KR" sz="1600" dirty="0">
@@ -14195,15 +14187,7 @@
                 <a:ea typeface="Pretendard" pitchFamily="34" charset="-122"/>
                 <a:cs typeface="Pretendard" pitchFamily="34" charset="-120"/>
               </a:rPr>
-              <a:t>Gmail </a:t>
-            </a:r>
-            <a:r>
-              <a:rPr lang="ko-KR" altLang="en-US" sz="1600" dirty="0" err="1">
-                <a:latin typeface="Pretendard" pitchFamily="34" charset="0"/>
-                <a:ea typeface="Pretendard" pitchFamily="34" charset="-122"/>
-                <a:cs typeface="Pretendard" pitchFamily="34" charset="-120"/>
-              </a:rPr>
-              <a:t>임시편지함으로</a:t>
+              <a:t>, </a:t>
             </a:r>
             <a:r>
               <a:rPr lang="ko-KR" altLang="en-US" sz="1600" dirty="0">
@@ -14211,30 +14195,7 @@
                 <a:ea typeface="Pretendard" pitchFamily="34" charset="-122"/>
                 <a:cs typeface="Pretendard" pitchFamily="34" charset="-120"/>
               </a:rPr>
-              <a:t> </a:t>
-            </a:r>
-            <a:br>
-              <a:rPr lang="en-US" altLang="ko-KR" sz="1600" dirty="0">
-                <a:latin typeface="Pretendard" pitchFamily="34" charset="0"/>
-                <a:ea typeface="Pretendard" pitchFamily="34" charset="-122"/>
-                <a:cs typeface="Pretendard" pitchFamily="34" charset="-120"/>
-              </a:rPr>
-            </a:br>
-            <a:r>
-              <a:rPr lang="en-US" altLang="ko-KR" sz="1600" dirty="0">
-                <a:latin typeface="Pretendard" pitchFamily="34" charset="0"/>
-                <a:ea typeface="Pretendard" pitchFamily="34" charset="-122"/>
-                <a:cs typeface="Pretendard" pitchFamily="34" charset="-120"/>
-              </a:rPr>
-              <a:t>  </a:t>
-            </a:r>
-            <a:r>
-              <a:rPr lang="ko-KR" altLang="en-US" sz="1600" dirty="0">
-                <a:latin typeface="Pretendard" pitchFamily="34" charset="0"/>
-                <a:ea typeface="Pretendard" pitchFamily="34" charset="-122"/>
-                <a:cs typeface="Pretendard" pitchFamily="34" charset="-120"/>
-              </a:rPr>
-              <a:t>등록하도록 함</a:t>
+              <a:t>건수 등 제약 </a:t>
             </a:r>
             <a:endParaRPr lang="en-US" sz="1600" dirty="0">
               <a:latin typeface="Pretendard" pitchFamily="34" charset="0"/>
@@ -14287,12 +14248,20 @@
               <a:buChar char="•"/>
             </a:pPr>
             <a:r>
+              <a:rPr lang="en-US" sz="1600" dirty="0" err="1">
+                <a:latin typeface="Pretendard" pitchFamily="34" charset="0"/>
+                <a:ea typeface="Pretendard" pitchFamily="34" charset="-122"/>
+                <a:cs typeface="Pretendard" pitchFamily="34" charset="-120"/>
+              </a:rPr>
+              <a:t>주기</a:t>
+            </a:r>
+            <a:r>
               <a:rPr lang="en-US" sz="1600" dirty="0">
                 <a:latin typeface="Pretendard" pitchFamily="34" charset="0"/>
                 <a:ea typeface="Pretendard" pitchFamily="34" charset="-122"/>
                 <a:cs typeface="Pretendard" pitchFamily="34" charset="-120"/>
               </a:rPr>
-              <a:t>주기 설정 후 Run now로 시험 실행</a:t>
+              <a:t> 설정 후 Run now로 시험 실행</a:t>
             </a:r>
             <a:endParaRPr lang="en-US" sz="1600" dirty="0"/>
           </a:p>
@@ -14732,6 +14701,78 @@
               <a:t>9</a:t>
             </a:fld>
             <a:endParaRPr lang="en-US"/>
+          </a:p>
+        </p:txBody>
+      </p:sp>
+      <p:sp>
+        <p:nvSpPr>
+          <p:cNvPr id="21" name="직사각형 20">
+            <a:hlinkClick r:id="rId3"/>
+            <a:extLst>
+              <a:ext uri="{FF2B5EF4-FFF2-40B4-BE49-F238E27FC236}">
+                <a16:creationId xmlns:a16="http://schemas.microsoft.com/office/drawing/2014/main" id="{547D8E71-ECDD-5AED-7494-F719446D6313}"/>
+              </a:ext>
+            </a:extLst>
+          </p:cNvPr>
+          <p:cNvSpPr/>
+          <p:nvPr/>
+        </p:nvSpPr>
+        <p:spPr>
+          <a:xfrm>
+            <a:off x="5350669" y="4257675"/>
+            <a:ext cx="3976211" cy="451485"/>
+          </a:xfrm>
+          <a:prstGeom prst="rect">
+            <a:avLst/>
+          </a:prstGeom>
+          <a:solidFill>
+            <a:schemeClr val="accent5">
+              <a:lumMod val="20000"/>
+              <a:lumOff val="80000"/>
+            </a:schemeClr>
+          </a:solidFill>
+          <a:ln/>
+        </p:spPr>
+        <p:txBody>
+          <a:bodyPr wrap="square" rtlCol="0" anchor="ctr"/>
+          <a:lstStyle/>
+          <a:p>
+            <a:pPr algn="ctr">
+              <a:lnSpc>
+                <a:spcPct val="105000"/>
+              </a:lnSpc>
+              <a:spcAft>
+                <a:spcPts val="1000"/>
+              </a:spcAft>
+              <a:buSzPct val="100000"/>
+            </a:pPr>
+            <a:r>
+              <a:rPr lang="ko-KR" altLang="en-US" sz="1600" dirty="0">
+                <a:solidFill>
+                  <a:schemeClr val="tx1"/>
+                </a:solidFill>
+                <a:latin typeface="Pretendard" pitchFamily="34" charset="0"/>
+                <a:ea typeface="Pretendard" pitchFamily="34" charset="-122"/>
+                <a:cs typeface="Pretendard" pitchFamily="34" charset="-120"/>
+              </a:rPr>
+              <a:t>예제 </a:t>
+            </a:r>
+            <a:r>
+              <a:rPr lang="ko-KR" altLang="en-US" sz="1600" dirty="0">
+                <a:latin typeface="Pretendard" pitchFamily="34" charset="0"/>
+                <a:ea typeface="Pretendard" pitchFamily="34" charset="-122"/>
+                <a:cs typeface="Pretendard" pitchFamily="34" charset="-120"/>
+              </a:rPr>
+              <a:t>보기</a:t>
+            </a:r>
+            <a:endParaRPr lang="ko-KR" altLang="en-US" sz="1600" dirty="0">
+              <a:solidFill>
+                <a:schemeClr val="tx1"/>
+              </a:solidFill>
+              <a:latin typeface="Pretendard" pitchFamily="34" charset="0"/>
+              <a:ea typeface="Pretendard" pitchFamily="34" charset="-122"/>
+              <a:cs typeface="Pretendard" pitchFamily="34" charset="-120"/>
+            </a:endParaRPr>
           </a:p>
         </p:txBody>
       </p:sp>

--- a/decks/02-connectors-routines/2회차-커넥터-루틴-ComputerUse.pptx
+++ b/decks/02-connectors-routines/2회차-커넥터-루틴-ComputerUse.pptx
@@ -1372,7 +1372,7 @@
           </a:prstGeom>
           <a:extLst>
             <a:ext uri="{C572A759-6A51-4108-AA02-DFA0A04FC94B}">
-              <ma14:wrappingTextBoxFlag xmlns="" xmlns:ma14="http://schemas.microsoft.com/office/mac/drawingml/2011/main" val="0"/>
+              <ma14:wrappingTextBoxFlag xmlns:ma14="http://schemas.microsoft.com/office/mac/drawingml/2011/main" xmlns="" val="0"/>
             </a:ext>
           </a:extLst>
         </p:spPr>
@@ -1450,7 +1450,7 @@
           </a:prstGeom>
           <a:extLst>
             <a:ext uri="{C572A759-6A51-4108-AA02-DFA0A04FC94B}">
-              <ma14:wrappingTextBoxFlag xmlns="" xmlns:ma14="http://schemas.microsoft.com/office/mac/drawingml/2011/main" val="0"/>
+              <ma14:wrappingTextBoxFlag xmlns:ma14="http://schemas.microsoft.com/office/mac/drawingml/2011/main" xmlns="" val="0"/>
             </a:ext>
           </a:extLst>
         </p:spPr>
@@ -3004,7 +3004,7 @@
           </a:prstGeom>
           <a:extLst>
             <a:ext uri="{C572A759-6A51-4108-AA02-DFA0A04FC94B}">
-              <ma14:wrappingTextBoxFlag xmlns="" xmlns:ma14="http://schemas.microsoft.com/office/mac/drawingml/2011/main" val="0"/>
+              <ma14:wrappingTextBoxFlag xmlns:ma14="http://schemas.microsoft.com/office/mac/drawingml/2011/main" xmlns="" val="0"/>
             </a:ext>
           </a:extLst>
         </p:spPr>
@@ -4122,7 +4122,7 @@
           </a:prstGeom>
           <a:extLst>
             <a:ext uri="{C572A759-6A51-4108-AA02-DFA0A04FC94B}">
-              <ma14:wrappingTextBoxFlag xmlns="" xmlns:ma14="http://schemas.microsoft.com/office/mac/drawingml/2011/main" val="0"/>
+              <ma14:wrappingTextBoxFlag xmlns:ma14="http://schemas.microsoft.com/office/mac/drawingml/2011/main" xmlns="" val="0"/>
             </a:ext>
           </a:extLst>
         </p:spPr>
@@ -5304,7 +5304,7 @@
           </a:prstGeom>
           <a:extLst>
             <a:ext uri="{C572A759-6A51-4108-AA02-DFA0A04FC94B}">
-              <ma14:wrappingTextBoxFlag xmlns="" xmlns:ma14="http://schemas.microsoft.com/office/mac/drawingml/2011/main" val="0"/>
+              <ma14:wrappingTextBoxFlag xmlns:ma14="http://schemas.microsoft.com/office/mac/drawingml/2011/main" xmlns="" val="0"/>
             </a:ext>
           </a:extLst>
         </p:spPr>
@@ -6877,7 +6877,7 @@
           </a:prstGeom>
           <a:extLst>
             <a:ext uri="{C572A759-6A51-4108-AA02-DFA0A04FC94B}">
-              <ma14:wrappingTextBoxFlag xmlns="" xmlns:ma14="http://schemas.microsoft.com/office/mac/drawingml/2011/main" val="0"/>
+              <ma14:wrappingTextBoxFlag xmlns:ma14="http://schemas.microsoft.com/office/mac/drawingml/2011/main" xmlns="" val="0"/>
             </a:ext>
           </a:extLst>
         </p:spPr>
@@ -7680,7 +7680,7 @@
           </a:prstGeom>
           <a:extLst>
             <a:ext uri="{C572A759-6A51-4108-AA02-DFA0A04FC94B}">
-              <ma14:wrappingTextBoxFlag xmlns="" xmlns:ma14="http://schemas.microsoft.com/office/mac/drawingml/2011/main" val="0"/>
+              <ma14:wrappingTextBoxFlag xmlns:ma14="http://schemas.microsoft.com/office/mac/drawingml/2011/main" xmlns="" val="0"/>
             </a:ext>
           </a:extLst>
         </p:spPr>
@@ -8803,7 +8803,7 @@
           </a:prstGeom>
           <a:extLst>
             <a:ext uri="{C572A759-6A51-4108-AA02-DFA0A04FC94B}">
-              <ma14:wrappingTextBoxFlag xmlns="" xmlns:ma14="http://schemas.microsoft.com/office/mac/drawingml/2011/main" val="0"/>
+              <ma14:wrappingTextBoxFlag xmlns:ma14="http://schemas.microsoft.com/office/mac/drawingml/2011/main" xmlns="" val="0"/>
             </a:ext>
           </a:extLst>
         </p:spPr>
@@ -9138,7 +9138,7 @@
           </a:prstGeom>
           <a:extLst>
             <a:ext uri="{C572A759-6A51-4108-AA02-DFA0A04FC94B}">
-              <ma14:wrappingTextBoxFlag xmlns="" xmlns:ma14="http://schemas.microsoft.com/office/mac/drawingml/2011/main" val="0"/>
+              <ma14:wrappingTextBoxFlag xmlns:ma14="http://schemas.microsoft.com/office/mac/drawingml/2011/main" xmlns="" val="0"/>
             </a:ext>
           </a:extLst>
         </p:spPr>
@@ -11428,7 +11428,7 @@
           </a:prstGeom>
           <a:extLst>
             <a:ext uri="{C572A759-6A51-4108-AA02-DFA0A04FC94B}">
-              <ma14:wrappingTextBoxFlag xmlns="" xmlns:ma14="http://schemas.microsoft.com/office/mac/drawingml/2011/main" val="0"/>
+              <ma14:wrappingTextBoxFlag xmlns:ma14="http://schemas.microsoft.com/office/mac/drawingml/2011/main" xmlns="" val="0"/>
             </a:ext>
           </a:extLst>
         </p:spPr>
@@ -12691,7 +12691,7 @@
           </a:prstGeom>
           <a:extLst>
             <a:ext uri="{C572A759-6A51-4108-AA02-DFA0A04FC94B}">
-              <ma14:wrappingTextBoxFlag xmlns="" xmlns:ma14="http://schemas.microsoft.com/office/mac/drawingml/2011/main" val="0"/>
+              <ma14:wrappingTextBoxFlag xmlns:ma14="http://schemas.microsoft.com/office/mac/drawingml/2011/main" xmlns="" val="0"/>
             </a:ext>
           </a:extLst>
         </p:spPr>
@@ -13537,7 +13537,7 @@
           </a:prstGeom>
           <a:extLst>
             <a:ext uri="{C572A759-6A51-4108-AA02-DFA0A04FC94B}">
-              <ma14:wrappingTextBoxFlag xmlns="" xmlns:ma14="http://schemas.microsoft.com/office/mac/drawingml/2011/main" val="0"/>
+              <ma14:wrappingTextBoxFlag xmlns:ma14="http://schemas.microsoft.com/office/mac/drawingml/2011/main" xmlns="" val="0"/>
             </a:ext>
           </a:extLst>
         </p:spPr>
@@ -13592,33 +13592,6 @@
       </p:grpSpPr>
       <p:sp>
         <p:nvSpPr>
-          <p:cNvPr id="2" name="Shape 0"/>
-          <p:cNvSpPr/>
-          <p:nvPr/>
-        </p:nvSpPr>
-        <p:spPr>
-          <a:xfrm>
-            <a:off x="457200" y="457200"/>
-            <a:ext cx="82296" cy="548640"/>
-          </a:xfrm>
-          <a:prstGeom prst="rect">
-            <a:avLst/>
-          </a:prstGeom>
-          <a:solidFill>
-            <a:srgbClr val="059669"/>
-          </a:solidFill>
-          <a:ln/>
-        </p:spPr>
-        <p:txBody>
-          <a:bodyPr/>
-          <a:lstStyle/>
-          <a:p>
-            <a:endParaRPr lang="ko-KR" altLang="en-US"/>
-          </a:p>
-        </p:txBody>
-      </p:sp>
-      <p:sp>
-        <p:nvSpPr>
           <p:cNvPr id="3" name="Text 1"/>
           <p:cNvSpPr/>
           <p:nvPr/>
@@ -13703,8 +13676,8 @@
         </p:nvSpPr>
         <p:spPr>
           <a:xfrm>
-            <a:off x="457200" y="1600200"/>
-            <a:ext cx="4434840" cy="3246120"/>
+            <a:off x="2371725" y="1864519"/>
+            <a:ext cx="4434840" cy="2093119"/>
           </a:xfrm>
           <a:prstGeom prst="roundRect">
             <a:avLst>
@@ -13737,7 +13710,7 @@
         </p:nvSpPr>
         <p:spPr>
           <a:xfrm>
-            <a:off x="457200" y="1600200"/>
+            <a:off x="2371725" y="1864519"/>
             <a:ext cx="4434840" cy="502920"/>
           </a:xfrm>
           <a:prstGeom prst="roundRect">
@@ -13766,7 +13739,7 @@
         </p:nvSpPr>
         <p:spPr>
           <a:xfrm>
-            <a:off x="457200" y="1600200"/>
+            <a:off x="2371725" y="1864519"/>
             <a:ext cx="4434840" cy="502920"/>
           </a:xfrm>
           <a:prstGeom prst="rect">
@@ -13780,17 +13753,6 @@
           <a:lstStyle/>
           <a:p>
             <a:pPr algn="ctr"/>
-            <a:r>
-              <a:rPr lang="en-US" sz="1600" b="1" dirty="0">
-                <a:solidFill>
-                  <a:srgbClr val="FFFFFF"/>
-                </a:solidFill>
-                <a:latin typeface="Pretendard" pitchFamily="34" charset="0"/>
-                <a:ea typeface="Pretendard" pitchFamily="34" charset="-122"/>
-                <a:cs typeface="Pretendard" pitchFamily="34" charset="-120"/>
-              </a:rPr>
-              <a:t>① </a:t>
-            </a:r>
             <a:r>
               <a:rPr lang="ko-KR" altLang="en-US" sz="1600" b="1" dirty="0">
                 <a:solidFill>
@@ -13858,8 +13820,8 @@
         </p:nvSpPr>
         <p:spPr>
           <a:xfrm>
-            <a:off x="658368" y="2240280"/>
-            <a:ext cx="4032504" cy="2468880"/>
+            <a:off x="2572893" y="2504599"/>
+            <a:ext cx="4032504" cy="1260158"/>
           </a:xfrm>
           <a:prstGeom prst="rect">
             <a:avLst/>
@@ -13895,7 +13857,55 @@
                 <a:ea typeface="Pretendard" pitchFamily="34" charset="-122"/>
                 <a:cs typeface="Pretendard" pitchFamily="34" charset="-120"/>
               </a:rPr>
-              <a:t> 커넥터 연결 후</a:t>
+              <a:t> 커넥터 </a:t>
+            </a:r>
+            <a:r>
+              <a:rPr lang="en-US" sz="1600" dirty="0" err="1">
+                <a:latin typeface="Pretendard" pitchFamily="34" charset="0"/>
+                <a:ea typeface="Pretendard" pitchFamily="34" charset="-122"/>
+                <a:cs typeface="Pretendard" pitchFamily="34" charset="-120"/>
+              </a:rPr>
+              <a:t>연결</a:t>
+            </a:r>
+            <a:r>
+              <a:rPr lang="en-US" sz="1600" dirty="0">
+                <a:latin typeface="Pretendard" pitchFamily="34" charset="0"/>
+                <a:ea typeface="Pretendard" pitchFamily="34" charset="-122"/>
+                <a:cs typeface="Pretendard" pitchFamily="34" charset="-120"/>
+              </a:rPr>
+              <a:t> 후 </a:t>
+            </a:r>
+            <a:r>
+              <a:rPr lang="ko-KR" altLang="en-US" sz="1600" dirty="0" err="1">
+                <a:latin typeface="Pretendard" pitchFamily="34" charset="0"/>
+                <a:ea typeface="Pretendard" pitchFamily="34" charset="-122"/>
+                <a:cs typeface="Pretendard" pitchFamily="34" charset="-120"/>
+              </a:rPr>
+              <a:t>카카오맵</a:t>
+            </a:r>
+            <a:r>
+              <a:rPr lang="ko-KR" altLang="en-US" sz="1600" dirty="0">
+                <a:latin typeface="Pretendard" pitchFamily="34" charset="0"/>
+                <a:ea typeface="Pretendard" pitchFamily="34" charset="-122"/>
+                <a:cs typeface="Pretendard" pitchFamily="34" charset="-120"/>
+              </a:rPr>
+              <a:t> </a:t>
+            </a:r>
+            <a:r>
+              <a:rPr lang="en-US" altLang="ko-KR" sz="1600" dirty="0">
+                <a:latin typeface="Pretendard" pitchFamily="34" charset="0"/>
+                <a:ea typeface="Pretendard" pitchFamily="34" charset="-122"/>
+                <a:cs typeface="Pretendard" pitchFamily="34" charset="-120"/>
+              </a:rPr>
+              <a:t>MCP </a:t>
+            </a:r>
+            <a:r>
+              <a:rPr lang="ko-KR" altLang="en-US" sz="1600" dirty="0">
+                <a:latin typeface="Pretendard" pitchFamily="34" charset="0"/>
+                <a:ea typeface="Pretendard" pitchFamily="34" charset="-122"/>
+                <a:cs typeface="Pretendard" pitchFamily="34" charset="-120"/>
+              </a:rPr>
+              <a:t>추가</a:t>
             </a:r>
             <a:endParaRPr lang="en-US" sz="1600" dirty="0"/>
           </a:p>
@@ -13971,7 +13981,7 @@
         </p:nvSpPr>
         <p:spPr>
           <a:xfrm>
-            <a:off x="5093208" y="1600200"/>
+            <a:off x="2371725" y="4343400"/>
             <a:ext cx="4434840" cy="3246120"/>
           </a:xfrm>
           <a:prstGeom prst="roundRect">
@@ -14005,7 +14015,7 @@
         </p:nvSpPr>
         <p:spPr>
           <a:xfrm>
-            <a:off x="5093208" y="1600200"/>
+            <a:off x="2371725" y="4343400"/>
             <a:ext cx="4434840" cy="502920"/>
           </a:xfrm>
           <a:prstGeom prst="roundRect">
@@ -14034,7 +14044,7 @@
         </p:nvSpPr>
         <p:spPr>
           <a:xfrm>
-            <a:off x="5093208" y="1600200"/>
+            <a:off x="2371725" y="4343400"/>
             <a:ext cx="4434840" cy="502920"/>
           </a:xfrm>
           <a:prstGeom prst="rect">
@@ -14051,6 +14061,17 @@
               <a:buNone/>
             </a:pPr>
             <a:r>
+              <a:rPr lang="en-US" sz="1600" b="1" dirty="0" err="1">
+                <a:solidFill>
+                  <a:srgbClr val="FFFFFF"/>
+                </a:solidFill>
+                <a:latin typeface="Pretendard" pitchFamily="34" charset="0"/>
+                <a:ea typeface="Pretendard" pitchFamily="34" charset="-122"/>
+                <a:cs typeface="Pretendard" pitchFamily="34" charset="-120"/>
+              </a:rPr>
+              <a:t>루틴</a:t>
+            </a:r>
+            <a:r>
               <a:rPr lang="en-US" sz="1600" b="1" dirty="0">
                 <a:solidFill>
                   <a:srgbClr val="FFFFFF"/>
@@ -14059,7 +14080,73 @@
                 <a:ea typeface="Pretendard" pitchFamily="34" charset="-122"/>
                 <a:cs typeface="Pretendard" pitchFamily="34" charset="-120"/>
               </a:rPr>
-              <a:t>② 루틴 · 아침 뉴스레터</a:t>
+              <a:t> · </a:t>
+            </a:r>
+            <a:r>
+              <a:rPr lang="en-US" sz="1600" b="1" dirty="0" err="1">
+                <a:solidFill>
+                  <a:srgbClr val="FFFFFF"/>
+                </a:solidFill>
+                <a:latin typeface="Pretendard" pitchFamily="34" charset="0"/>
+                <a:ea typeface="Pretendard" pitchFamily="34" charset="-122"/>
+                <a:cs typeface="Pretendard" pitchFamily="34" charset="-120"/>
+              </a:rPr>
+              <a:t>아침</a:t>
+            </a:r>
+            <a:r>
+              <a:rPr lang="en-US" sz="1600" b="1" dirty="0">
+                <a:solidFill>
+                  <a:srgbClr val="FFFFFF"/>
+                </a:solidFill>
+                <a:latin typeface="Pretendard" pitchFamily="34" charset="0"/>
+                <a:ea typeface="Pretendard" pitchFamily="34" charset="-122"/>
+                <a:cs typeface="Pretendard" pitchFamily="34" charset="-120"/>
+              </a:rPr>
+              <a:t> </a:t>
+            </a:r>
+            <a:r>
+              <a:rPr lang="en-US" sz="1600" b="1" dirty="0" err="1">
+                <a:solidFill>
+                  <a:srgbClr val="FFFFFF"/>
+                </a:solidFill>
+                <a:latin typeface="Pretendard" pitchFamily="34" charset="0"/>
+                <a:ea typeface="Pretendard" pitchFamily="34" charset="-122"/>
+                <a:cs typeface="Pretendard" pitchFamily="34" charset="-120"/>
+              </a:rPr>
+              <a:t>뉴스레터</a:t>
+            </a:r>
+            <a:r>
+              <a:rPr lang="en-US" sz="1600" b="1" dirty="0">
+                <a:solidFill>
+                  <a:srgbClr val="FFFFFF"/>
+                </a:solidFill>
+                <a:latin typeface="Pretendard" pitchFamily="34" charset="0"/>
+                <a:ea typeface="Pretendard" pitchFamily="34" charset="-122"/>
+                <a:cs typeface="Pretendard" pitchFamily="34" charset="-120"/>
+              </a:rPr>
+              <a:t>(</a:t>
+            </a:r>
+            <a:r>
+              <a:rPr lang="ko-KR" altLang="en-US" sz="1600" b="1" dirty="0">
+                <a:solidFill>
+                  <a:srgbClr val="FFFFFF"/>
+                </a:solidFill>
+                <a:latin typeface="Pretendard" pitchFamily="34" charset="0"/>
+                <a:ea typeface="Pretendard" pitchFamily="34" charset="-122"/>
+                <a:cs typeface="Pretendard" pitchFamily="34" charset="-120"/>
+              </a:rPr>
+              <a:t>앱 개발</a:t>
+            </a:r>
+            <a:r>
+              <a:rPr lang="en-US" altLang="ko-KR" sz="1600" b="1" dirty="0">
+                <a:solidFill>
+                  <a:srgbClr val="FFFFFF"/>
+                </a:solidFill>
+                <a:latin typeface="Pretendard" pitchFamily="34" charset="0"/>
+                <a:ea typeface="Pretendard" pitchFamily="34" charset="-122"/>
+                <a:cs typeface="Pretendard" pitchFamily="34" charset="-120"/>
+              </a:rPr>
+              <a:t>)</a:t>
             </a:r>
             <a:endParaRPr lang="en-US" sz="1600" dirty="0"/>
           </a:p>
@@ -14073,7 +14160,7 @@
         </p:nvSpPr>
         <p:spPr>
           <a:xfrm>
-            <a:off x="5294376" y="2240280"/>
+            <a:off x="2572893" y="4983480"/>
             <a:ext cx="4032504" cy="2017395"/>
           </a:xfrm>
           <a:prstGeom prst="rect">
@@ -14195,7 +14282,7 @@
                 <a:ea typeface="Pretendard" pitchFamily="34" charset="-122"/>
                 <a:cs typeface="Pretendard" pitchFamily="34" charset="-120"/>
               </a:rPr>
-              <a:t>건수 등 제약 </a:t>
+              <a:t>건수 등 제약 명시</a:t>
             </a:r>
             <a:endParaRPr lang="en-US" sz="1600" dirty="0">
               <a:latin typeface="Pretendard" pitchFamily="34" charset="0"/>
@@ -14275,7 +14362,7 @@
         </p:nvSpPr>
         <p:spPr>
           <a:xfrm>
-            <a:off x="9729216" y="1600200"/>
+            <a:off x="7007733" y="4343400"/>
             <a:ext cx="4434840" cy="3246120"/>
           </a:xfrm>
           <a:prstGeom prst="roundRect">
@@ -14309,7 +14396,7 @@
         </p:nvSpPr>
         <p:spPr>
           <a:xfrm>
-            <a:off x="9729216" y="1600200"/>
+            <a:off x="7007733" y="4343400"/>
             <a:ext cx="4434840" cy="502920"/>
           </a:xfrm>
           <a:prstGeom prst="roundRect">
@@ -14338,7 +14425,7 @@
         </p:nvSpPr>
         <p:spPr>
           <a:xfrm>
-            <a:off x="9729216" y="1600200"/>
+            <a:off x="7007733" y="4343400"/>
             <a:ext cx="4434840" cy="502920"/>
           </a:xfrm>
           <a:prstGeom prst="rect">
@@ -14363,7 +14450,7 @@
                 <a:ea typeface="Pretendard" pitchFamily="34" charset="-122"/>
                 <a:cs typeface="Pretendard" pitchFamily="34" charset="-120"/>
               </a:rPr>
-              <a:t>③ Computer use · 관찰</a:t>
+              <a:t>Computer use · 관찰</a:t>
             </a:r>
             <a:endParaRPr lang="en-US" sz="1600" dirty="0"/>
           </a:p>
@@ -14377,7 +14464,7 @@
         </p:nvSpPr>
         <p:spPr>
           <a:xfrm>
-            <a:off x="9930384" y="2240280"/>
+            <a:off x="7208901" y="4983480"/>
             <a:ext cx="4032504" cy="2468880"/>
           </a:xfrm>
           <a:prstGeom prst="rect">
@@ -14587,77 +14674,6 @@
       </p:sp>
       <p:sp>
         <p:nvSpPr>
-          <p:cNvPr id="17" name="Shape 15"/>
-          <p:cNvSpPr/>
-          <p:nvPr/>
-        </p:nvSpPr>
-        <p:spPr>
-          <a:xfrm>
-            <a:off x="457200" y="5120640"/>
-            <a:ext cx="13716000" cy="731520"/>
-          </a:xfrm>
-          <a:prstGeom prst="roundRect">
-            <a:avLst>
-              <a:gd name="adj" fmla="val 10000"/>
-            </a:avLst>
-          </a:prstGeom>
-          <a:solidFill>
-            <a:srgbClr val="CCFBF1"/>
-          </a:solidFill>
-          <a:ln/>
-        </p:spPr>
-        <p:txBody>
-          <a:bodyPr/>
-          <a:lstStyle/>
-          <a:p>
-            <a:endParaRPr lang="ko-KR" altLang="en-US"/>
-          </a:p>
-        </p:txBody>
-      </p:sp>
-      <p:sp>
-        <p:nvSpPr>
-          <p:cNvPr id="18" name="Text 16"/>
-          <p:cNvSpPr/>
-          <p:nvPr/>
-        </p:nvSpPr>
-        <p:spPr>
-          <a:xfrm>
-            <a:off x="640080" y="5120640"/>
-            <a:ext cx="13350240" cy="731520"/>
-          </a:xfrm>
-          <a:prstGeom prst="rect">
-            <a:avLst/>
-          </a:prstGeom>
-          <a:noFill/>
-          <a:ln/>
-        </p:spPr>
-        <p:txBody>
-          <a:bodyPr wrap="square" rtlCol="0" anchor="ctr"/>
-          <a:lstStyle/>
-          <a:p>
-            <a:pPr marL="0" indent="0" algn="l">
-              <a:lnSpc>
-                <a:spcPct val="105000"/>
-              </a:lnSpc>
-              <a:buNone/>
-            </a:pPr>
-            <a:r>
-              <a:rPr lang="en-US" sz="1700" b="1" dirty="0">
-                <a:solidFill>
-                  <a:srgbClr val="2C2926"/>
-                </a:solidFill>
-                <a:latin typeface="Pretendard" pitchFamily="34" charset="0"/>
-                <a:ea typeface="Pretendard" pitchFamily="34" charset="-122"/>
-                <a:cs typeface="Pretendard" pitchFamily="34" charset="-120"/>
-              </a:rPr>
-              <a:t>오늘의 산출물: 커넥터 1건 연결 + 루틴 1건 생성   ·   모두 "내가 선택한 폴더 안에서 / 사람이 승인하며" 진행</a:t>
-            </a:r>
-            <a:endParaRPr lang="en-US" sz="1700" dirty="0"/>
-          </a:p>
-        </p:txBody>
-      </p:sp>
-      <p:sp>
-        <p:nvSpPr>
           <p:cNvPr id="25" name="Slide Number Placeholder 0"/>
           <p:cNvSpPr>
             <a:spLocks noGrp="1"/>
@@ -14676,7 +14692,7 @@
           </a:prstGeom>
           <a:extLst>
             <a:ext uri="{C572A759-6A51-4108-AA02-DFA0A04FC94B}">
-              <ma14:wrappingTextBoxFlag xmlns="" xmlns:ma14="http://schemas.microsoft.com/office/mac/drawingml/2011/main" val="0"/>
+              <ma14:wrappingTextBoxFlag xmlns:ma14="http://schemas.microsoft.com/office/mac/drawingml/2011/main" xmlns="" val="0"/>
             </a:ext>
           </a:extLst>
         </p:spPr>
@@ -14719,7 +14735,7 @@
         </p:nvSpPr>
         <p:spPr>
           <a:xfrm>
-            <a:off x="5350669" y="4257675"/>
+            <a:off x="2629186" y="7000875"/>
             <a:ext cx="3976211" cy="451485"/>
           </a:xfrm>
           <a:prstGeom prst="rect">
@@ -14769,6 +14785,388 @@
               <a:solidFill>
                 <a:schemeClr val="tx1"/>
               </a:solidFill>
+              <a:latin typeface="Pretendard" pitchFamily="34" charset="0"/>
+              <a:ea typeface="Pretendard" pitchFamily="34" charset="-122"/>
+              <a:cs typeface="Pretendard" pitchFamily="34" charset="-120"/>
+            </a:endParaRPr>
+          </a:p>
+        </p:txBody>
+      </p:sp>
+      <p:sp>
+        <p:nvSpPr>
+          <p:cNvPr id="2" name="Shape 3">
+            <a:extLst>
+              <a:ext uri="{FF2B5EF4-FFF2-40B4-BE49-F238E27FC236}">
+                <a16:creationId xmlns:a16="http://schemas.microsoft.com/office/drawing/2014/main" id="{712962EB-5484-21A7-5F3C-8563986B6185}"/>
+              </a:ext>
+            </a:extLst>
+          </p:cNvPr>
+          <p:cNvSpPr/>
+          <p:nvPr/>
+        </p:nvSpPr>
+        <p:spPr>
+          <a:xfrm>
+            <a:off x="7007733" y="1864519"/>
+            <a:ext cx="4434840" cy="2093119"/>
+          </a:xfrm>
+          <a:prstGeom prst="roundRect">
+            <a:avLst>
+              <a:gd name="adj" fmla="val 2254"/>
+            </a:avLst>
+          </a:prstGeom>
+          <a:solidFill>
+            <a:srgbClr val="F5F5F7"/>
+          </a:solidFill>
+          <a:ln w="12700">
+            <a:solidFill>
+              <a:srgbClr val="DDDDE0"/>
+            </a:solidFill>
+            <a:prstDash val="solid"/>
+          </a:ln>
+        </p:spPr>
+        <p:txBody>
+          <a:bodyPr/>
+          <a:lstStyle/>
+          <a:p>
+            <a:endParaRPr lang="ko-KR" altLang="en-US"/>
+          </a:p>
+        </p:txBody>
+      </p:sp>
+      <p:sp>
+        <p:nvSpPr>
+          <p:cNvPr id="19" name="Shape 4">
+            <a:extLst>
+              <a:ext uri="{FF2B5EF4-FFF2-40B4-BE49-F238E27FC236}">
+                <a16:creationId xmlns:a16="http://schemas.microsoft.com/office/drawing/2014/main" id="{23D3B6E2-3550-2175-BC19-D35312EAB275}"/>
+              </a:ext>
+            </a:extLst>
+          </p:cNvPr>
+          <p:cNvSpPr/>
+          <p:nvPr/>
+        </p:nvSpPr>
+        <p:spPr>
+          <a:xfrm>
+            <a:off x="7007733" y="1864519"/>
+            <a:ext cx="4434840" cy="502920"/>
+          </a:xfrm>
+          <a:prstGeom prst="roundRect">
+            <a:avLst>
+              <a:gd name="adj" fmla="val 14545"/>
+            </a:avLst>
+          </a:prstGeom>
+          <a:solidFill>
+            <a:srgbClr val="1A6E36"/>
+          </a:solidFill>
+          <a:ln/>
+        </p:spPr>
+        <p:txBody>
+          <a:bodyPr/>
+          <a:lstStyle/>
+          <a:p>
+            <a:endParaRPr lang="ko-KR" altLang="en-US"/>
+          </a:p>
+        </p:txBody>
+      </p:sp>
+      <p:sp>
+        <p:nvSpPr>
+          <p:cNvPr id="20" name="Text 5">
+            <a:extLst>
+              <a:ext uri="{FF2B5EF4-FFF2-40B4-BE49-F238E27FC236}">
+                <a16:creationId xmlns:a16="http://schemas.microsoft.com/office/drawing/2014/main" id="{7EE1773F-22F6-6EB9-6BD6-28C715D28A3B}"/>
+              </a:ext>
+            </a:extLst>
+          </p:cNvPr>
+          <p:cNvSpPr/>
+          <p:nvPr/>
+        </p:nvSpPr>
+        <p:spPr>
+          <a:xfrm>
+            <a:off x="7007733" y="1864519"/>
+            <a:ext cx="4434840" cy="502920"/>
+          </a:xfrm>
+          <a:prstGeom prst="rect">
+            <a:avLst/>
+          </a:prstGeom>
+          <a:noFill/>
+          <a:ln/>
+        </p:spPr>
+        <p:txBody>
+          <a:bodyPr wrap="square" rtlCol="0" anchor="ctr"/>
+          <a:lstStyle/>
+          <a:p>
+            <a:pPr algn="ctr"/>
+            <a:r>
+              <a:rPr lang="en-US" altLang="ko-KR" sz="1600" b="1" dirty="0" err="1">
+                <a:solidFill>
+                  <a:srgbClr val="FFFFFF"/>
+                </a:solidFill>
+                <a:latin typeface="Pretendard" pitchFamily="34" charset="0"/>
+                <a:ea typeface="Pretendard" pitchFamily="34" charset="-122"/>
+                <a:cs typeface="Pretendard" pitchFamily="34" charset="-120"/>
+              </a:rPr>
+              <a:t>루틴</a:t>
+            </a:r>
+            <a:r>
+              <a:rPr lang="en-US" altLang="ko-KR" sz="1600" b="1" dirty="0">
+                <a:solidFill>
+                  <a:srgbClr val="FFFFFF"/>
+                </a:solidFill>
+                <a:latin typeface="Pretendard" pitchFamily="34" charset="0"/>
+                <a:ea typeface="Pretendard" pitchFamily="34" charset="-122"/>
+                <a:cs typeface="Pretendard" pitchFamily="34" charset="-120"/>
+              </a:rPr>
+              <a:t> · </a:t>
+            </a:r>
+            <a:r>
+              <a:rPr lang="ko-KR" altLang="en-US" sz="1600" b="1" dirty="0">
+                <a:solidFill>
+                  <a:srgbClr val="FFFFFF"/>
+                </a:solidFill>
+                <a:latin typeface="Pretendard" pitchFamily="34" charset="0"/>
+                <a:ea typeface="Pretendard" pitchFamily="34" charset="-122"/>
+                <a:cs typeface="Pretendard" pitchFamily="34" charset="-120"/>
+              </a:rPr>
+              <a:t>메일분석 및 카톡 발송</a:t>
+            </a:r>
+            <a:r>
+              <a:rPr lang="en-US" altLang="ko-KR" sz="1600" b="1" dirty="0">
+                <a:solidFill>
+                  <a:srgbClr val="FFFFFF"/>
+                </a:solidFill>
+                <a:latin typeface="Pretendard" pitchFamily="34" charset="0"/>
+                <a:ea typeface="Pretendard" pitchFamily="34" charset="-122"/>
+                <a:cs typeface="Pretendard" pitchFamily="34" charset="-120"/>
+              </a:rPr>
+              <a:t>(</a:t>
+            </a:r>
+            <a:r>
+              <a:rPr lang="ko-KR" altLang="en-US" sz="1600" b="1" dirty="0">
+                <a:solidFill>
+                  <a:srgbClr val="FFFFFF"/>
+                </a:solidFill>
+                <a:latin typeface="Pretendard" pitchFamily="34" charset="0"/>
+                <a:ea typeface="Pretendard" pitchFamily="34" charset="-122"/>
+                <a:cs typeface="Pretendard" pitchFamily="34" charset="-120"/>
+              </a:rPr>
+              <a:t>카톡 </a:t>
+            </a:r>
+            <a:r>
+              <a:rPr lang="ko-KR" altLang="en-US" sz="1600" b="1" dirty="0" err="1">
+                <a:solidFill>
+                  <a:srgbClr val="FFFFFF"/>
+                </a:solidFill>
+                <a:latin typeface="Pretendard" pitchFamily="34" charset="0"/>
+                <a:ea typeface="Pretendard" pitchFamily="34" charset="-122"/>
+                <a:cs typeface="Pretendard" pitchFamily="34" charset="-120"/>
+              </a:rPr>
+              <a:t>나챗방</a:t>
+            </a:r>
+            <a:r>
+              <a:rPr lang="ko-KR" altLang="en-US" sz="1600" b="1" dirty="0">
+                <a:solidFill>
+                  <a:srgbClr val="FFFFFF"/>
+                </a:solidFill>
+                <a:latin typeface="Pretendard" pitchFamily="34" charset="0"/>
+                <a:ea typeface="Pretendard" pitchFamily="34" charset="-122"/>
+                <a:cs typeface="Pretendard" pitchFamily="34" charset="-120"/>
+              </a:rPr>
+              <a:t> </a:t>
+            </a:r>
+            <a:r>
+              <a:rPr lang="en-US" altLang="ko-KR" sz="1600" b="1" dirty="0">
+                <a:solidFill>
+                  <a:srgbClr val="FFFFFF"/>
+                </a:solidFill>
+                <a:latin typeface="Pretendard" pitchFamily="34" charset="0"/>
+                <a:ea typeface="Pretendard" pitchFamily="34" charset="-122"/>
+                <a:cs typeface="Pretendard" pitchFamily="34" charset="-120"/>
+              </a:rPr>
+              <a:t>MCP)</a:t>
+            </a:r>
+            <a:endParaRPr lang="en-US" altLang="ko-KR" sz="1600" dirty="0"/>
+          </a:p>
+        </p:txBody>
+      </p:sp>
+      <p:sp>
+        <p:nvSpPr>
+          <p:cNvPr id="22" name="Text 6">
+            <a:extLst>
+              <a:ext uri="{FF2B5EF4-FFF2-40B4-BE49-F238E27FC236}">
+                <a16:creationId xmlns:a16="http://schemas.microsoft.com/office/drawing/2014/main" id="{B1B3127A-2029-17AB-C45C-56783E82973E}"/>
+              </a:ext>
+            </a:extLst>
+          </p:cNvPr>
+          <p:cNvSpPr/>
+          <p:nvPr/>
+        </p:nvSpPr>
+        <p:spPr>
+          <a:xfrm>
+            <a:off x="7208901" y="2504599"/>
+            <a:ext cx="4032504" cy="1260158"/>
+          </a:xfrm>
+          <a:prstGeom prst="rect">
+            <a:avLst/>
+          </a:prstGeom>
+          <a:noFill/>
+          <a:ln/>
+        </p:spPr>
+        <p:txBody>
+          <a:bodyPr wrap="square" rtlCol="0" anchor="t"/>
+          <a:lstStyle/>
+          <a:p>
+            <a:pPr marL="177800" indent="-177800" algn="l">
+              <a:lnSpc>
+                <a:spcPct val="105000"/>
+              </a:lnSpc>
+              <a:spcAft>
+                <a:spcPts val="1000"/>
+              </a:spcAft>
+              <a:buSzPct val="100000"/>
+              <a:buChar char="•"/>
+            </a:pPr>
+            <a:r>
+              <a:rPr lang="en-US" sz="1600" dirty="0" err="1">
+                <a:latin typeface="Pretendard" pitchFamily="34" charset="0"/>
+                <a:ea typeface="Pretendard" pitchFamily="34" charset="-122"/>
+                <a:cs typeface="Pretendard" pitchFamily="34" charset="-120"/>
+              </a:rPr>
+              <a:t>PlayMCP</a:t>
+            </a:r>
+            <a:r>
+              <a:rPr lang="en-US" sz="1600" dirty="0">
+                <a:latin typeface="Pretendard" pitchFamily="34" charset="0"/>
+                <a:ea typeface="Pretendard" pitchFamily="34" charset="-122"/>
+                <a:cs typeface="Pretendard" pitchFamily="34" charset="-120"/>
+              </a:rPr>
+              <a:t> 커넥터 </a:t>
+            </a:r>
+            <a:r>
+              <a:rPr lang="en-US" sz="1600" dirty="0" err="1">
+                <a:latin typeface="Pretendard" pitchFamily="34" charset="0"/>
+                <a:ea typeface="Pretendard" pitchFamily="34" charset="-122"/>
+                <a:cs typeface="Pretendard" pitchFamily="34" charset="-120"/>
+              </a:rPr>
+              <a:t>연결</a:t>
+            </a:r>
+            <a:r>
+              <a:rPr lang="en-US" sz="1600" dirty="0">
+                <a:latin typeface="Pretendard" pitchFamily="34" charset="0"/>
+                <a:ea typeface="Pretendard" pitchFamily="34" charset="-122"/>
+                <a:cs typeface="Pretendard" pitchFamily="34" charset="-120"/>
+              </a:rPr>
+              <a:t> 후 </a:t>
+            </a:r>
+            <a:r>
+              <a:rPr lang="ko-KR" altLang="en-US" sz="1600" dirty="0" err="1">
+                <a:latin typeface="Pretendard" pitchFamily="34" charset="0"/>
+                <a:ea typeface="Pretendard" pitchFamily="34" charset="-122"/>
+                <a:cs typeface="Pretendard" pitchFamily="34" charset="-120"/>
+              </a:rPr>
+              <a:t>나챗방</a:t>
+            </a:r>
+            <a:r>
+              <a:rPr lang="ko-KR" altLang="en-US" sz="1600" dirty="0">
+                <a:latin typeface="Pretendard" pitchFamily="34" charset="0"/>
+                <a:ea typeface="Pretendard" pitchFamily="34" charset="-122"/>
+                <a:cs typeface="Pretendard" pitchFamily="34" charset="-120"/>
+              </a:rPr>
+              <a:t> </a:t>
+            </a:r>
+            <a:r>
+              <a:rPr lang="en-US" altLang="ko-KR" sz="1600" dirty="0">
+                <a:latin typeface="Pretendard" pitchFamily="34" charset="0"/>
+                <a:ea typeface="Pretendard" pitchFamily="34" charset="-122"/>
+                <a:cs typeface="Pretendard" pitchFamily="34" charset="-120"/>
+              </a:rPr>
+              <a:t>MCP </a:t>
+            </a:r>
+            <a:r>
+              <a:rPr lang="ko-KR" altLang="en-US" sz="1600" dirty="0">
+                <a:latin typeface="Pretendard" pitchFamily="34" charset="0"/>
+                <a:ea typeface="Pretendard" pitchFamily="34" charset="-122"/>
+                <a:cs typeface="Pretendard" pitchFamily="34" charset="-120"/>
+              </a:rPr>
+              <a:t>추가</a:t>
+            </a:r>
+            <a:r>
+              <a:rPr lang="en-US" sz="1600" dirty="0">
+                <a:latin typeface="Pretendard" pitchFamily="34" charset="0"/>
+                <a:ea typeface="Pretendard" pitchFamily="34" charset="-122"/>
+                <a:cs typeface="Pretendard" pitchFamily="34" charset="-120"/>
+              </a:rPr>
+              <a:t> </a:t>
+            </a:r>
+            <a:endParaRPr lang="en-US" sz="1600" dirty="0"/>
+          </a:p>
+          <a:p>
+            <a:pPr marL="177800" indent="-177800" algn="l">
+              <a:lnSpc>
+                <a:spcPct val="105000"/>
+              </a:lnSpc>
+              <a:spcAft>
+                <a:spcPts val="1000"/>
+              </a:spcAft>
+              <a:buSzPct val="100000"/>
+              <a:buChar char="•"/>
+            </a:pPr>
+            <a:r>
+              <a:rPr lang="ko-KR" altLang="en-US" sz="1600" dirty="0">
+                <a:latin typeface="Pretendard" pitchFamily="34" charset="0"/>
+                <a:ea typeface="Pretendard" pitchFamily="34" charset="-122"/>
+                <a:cs typeface="Pretendard" pitchFamily="34" charset="-120"/>
+              </a:rPr>
+              <a:t>프롬프트 표준 가이드에 따라 </a:t>
+            </a:r>
+            <a:r>
+              <a:rPr lang="ko-KR" altLang="en-US" sz="1600" dirty="0" err="1">
+                <a:latin typeface="Pretendard" pitchFamily="34" charset="0"/>
+                <a:ea typeface="Pretendard" pitchFamily="34" charset="-122"/>
+                <a:cs typeface="Pretendard" pitchFamily="34" charset="-120"/>
+              </a:rPr>
+              <a:t>프롬프팅</a:t>
+            </a:r>
+            <a:endParaRPr lang="en-US" altLang="ko-KR" sz="1600" dirty="0">
+              <a:latin typeface="Pretendard" pitchFamily="34" charset="0"/>
+              <a:ea typeface="Pretendard" pitchFamily="34" charset="-122"/>
+              <a:cs typeface="Pretendard" pitchFamily="34" charset="-120"/>
+            </a:endParaRPr>
+          </a:p>
+          <a:p>
+            <a:pPr marL="177800" indent="-177800" algn="l">
+              <a:lnSpc>
+                <a:spcPct val="105000"/>
+              </a:lnSpc>
+              <a:spcAft>
+                <a:spcPts val="1000"/>
+              </a:spcAft>
+              <a:buSzPct val="100000"/>
+              <a:buChar char="•"/>
+            </a:pPr>
+            <a:r>
+              <a:rPr lang="ko-KR" altLang="en-US" sz="1600" dirty="0">
+                <a:latin typeface="Pretendard" pitchFamily="34" charset="0"/>
+                <a:ea typeface="Pretendard" pitchFamily="34" charset="-122"/>
+                <a:cs typeface="Pretendard" pitchFamily="34" charset="-120"/>
+              </a:rPr>
+              <a:t>원격 루틴 작성</a:t>
+            </a:r>
+            <a:r>
+              <a:rPr lang="en-US" altLang="ko-KR" sz="1600" dirty="0">
+                <a:latin typeface="Pretendard" pitchFamily="34" charset="0"/>
+                <a:ea typeface="Pretendard" pitchFamily="34" charset="-122"/>
+                <a:cs typeface="Pretendard" pitchFamily="34" charset="-120"/>
+              </a:rPr>
+              <a:t>. Run now</a:t>
+            </a:r>
+            <a:r>
+              <a:rPr lang="ko-KR" altLang="en-US" sz="1600" dirty="0">
+                <a:latin typeface="Pretendard" pitchFamily="34" charset="0"/>
+                <a:ea typeface="Pretendard" pitchFamily="34" charset="-122"/>
+                <a:cs typeface="Pretendard" pitchFamily="34" charset="-120"/>
+              </a:rPr>
+              <a:t>로 시험 실행</a:t>
+            </a:r>
+            <a:endParaRPr lang="en-US" altLang="ko-KR" sz="1600" dirty="0">
               <a:latin typeface="Pretendard" pitchFamily="34" charset="0"/>
               <a:ea typeface="Pretendard" pitchFamily="34" charset="-122"/>
               <a:cs typeface="Pretendard" pitchFamily="34" charset="-120"/>

--- a/decks/02-connectors-routines/2회차-커넥터-루틴-ComputerUse.pptx
+++ b/decks/02-connectors-routines/2회차-커넥터-루틴-ComputerUse.pptx
@@ -13615,6 +13615,17 @@
               <a:buNone/>
             </a:pPr>
             <a:r>
+              <a:rPr lang="en-US" sz="3200" b="1" dirty="0" err="1">
+                <a:solidFill>
+                  <a:srgbClr val="2C2926"/>
+                </a:solidFill>
+                <a:latin typeface="Pretendard" pitchFamily="34" charset="0"/>
+                <a:ea typeface="Pretendard" pitchFamily="34" charset="-122"/>
+                <a:cs typeface="Pretendard" pitchFamily="34" charset="-120"/>
+              </a:rPr>
+              <a:t>실습</a:t>
+            </a:r>
+            <a:r>
               <a:rPr lang="en-US" sz="3200" b="1" dirty="0">
                 <a:solidFill>
                   <a:srgbClr val="2C2926"/>
@@ -13623,7 +13634,7 @@
                 <a:ea typeface="Pretendard" pitchFamily="34" charset="-122"/>
                 <a:cs typeface="Pretendard" pitchFamily="34" charset="-120"/>
               </a:rPr>
-              <a:t>실습 3종 — 연결하고, 자동화하고, 관찰하기</a:t>
+              <a:t> 4종 — 연결하고, 자동화하고, 관찰하기</a:t>
             </a:r>
             <a:endParaRPr lang="en-US" sz="3200" dirty="0"/>
           </a:p>
@@ -13676,8 +13687,8 @@
         </p:nvSpPr>
         <p:spPr>
           <a:xfrm>
-            <a:off x="2371725" y="1864519"/>
-            <a:ext cx="4434840" cy="2093119"/>
+            <a:off x="2371725" y="1607341"/>
+            <a:ext cx="4434840" cy="2528890"/>
           </a:xfrm>
           <a:prstGeom prst="roundRect">
             <a:avLst>
@@ -13710,7 +13721,7 @@
         </p:nvSpPr>
         <p:spPr>
           <a:xfrm>
-            <a:off x="2371725" y="1864519"/>
+            <a:off x="2371725" y="1607341"/>
             <a:ext cx="4434840" cy="502920"/>
           </a:xfrm>
           <a:prstGeom prst="roundRect">
@@ -13739,7 +13750,7 @@
         </p:nvSpPr>
         <p:spPr>
           <a:xfrm>
-            <a:off x="2371725" y="1864519"/>
+            <a:off x="2371725" y="1607341"/>
             <a:ext cx="4434840" cy="502920"/>
           </a:xfrm>
           <a:prstGeom prst="rect">
@@ -13820,7 +13831,7 @@
         </p:nvSpPr>
         <p:spPr>
           <a:xfrm>
-            <a:off x="2572893" y="2504599"/>
+            <a:off x="2572893" y="2247421"/>
             <a:ext cx="4032504" cy="1260158"/>
           </a:xfrm>
           <a:prstGeom prst="rect">
@@ -14806,8 +14817,8 @@
         </p:nvSpPr>
         <p:spPr>
           <a:xfrm>
-            <a:off x="7007733" y="1864519"/>
-            <a:ext cx="4434840" cy="2093119"/>
+            <a:off x="7007733" y="1607341"/>
+            <a:ext cx="4434840" cy="2528890"/>
           </a:xfrm>
           <a:prstGeom prst="roundRect">
             <a:avLst>
@@ -14846,7 +14857,7 @@
         </p:nvSpPr>
         <p:spPr>
           <a:xfrm>
-            <a:off x="7007733" y="1864519"/>
+            <a:off x="7007733" y="1607341"/>
             <a:ext cx="4434840" cy="502920"/>
           </a:xfrm>
           <a:prstGeom prst="roundRect">
@@ -14881,7 +14892,7 @@
         </p:nvSpPr>
         <p:spPr>
           <a:xfrm>
-            <a:off x="7007733" y="1864519"/>
+            <a:off x="7007733" y="1607341"/>
             <a:ext cx="4434840" cy="502920"/>
           </a:xfrm>
           <a:prstGeom prst="rect">
@@ -15001,7 +15012,7 @@
         </p:nvSpPr>
         <p:spPr>
           <a:xfrm>
-            <a:off x="7208901" y="2504599"/>
+            <a:off x="7208901" y="2247421"/>
             <a:ext cx="4032504" cy="1260158"/>
           </a:xfrm>
           <a:prstGeom prst="rect">
@@ -15167,6 +15178,78 @@
               <a:t>로 시험 실행</a:t>
             </a:r>
             <a:endParaRPr lang="en-US" altLang="ko-KR" sz="1600" dirty="0">
+              <a:latin typeface="Pretendard" pitchFamily="34" charset="0"/>
+              <a:ea typeface="Pretendard" pitchFamily="34" charset="-122"/>
+              <a:cs typeface="Pretendard" pitchFamily="34" charset="-120"/>
+            </a:endParaRPr>
+          </a:p>
+        </p:txBody>
+      </p:sp>
+      <p:sp>
+        <p:nvSpPr>
+          <p:cNvPr id="23" name="직사각형 22">
+            <a:hlinkClick r:id="rId4"/>
+            <a:extLst>
+              <a:ext uri="{FF2B5EF4-FFF2-40B4-BE49-F238E27FC236}">
+                <a16:creationId xmlns:a16="http://schemas.microsoft.com/office/drawing/2014/main" id="{36F34B77-418C-1989-0FFA-516B6FC5F8D2}"/>
+              </a:ext>
+            </a:extLst>
+          </p:cNvPr>
+          <p:cNvSpPr/>
+          <p:nvPr/>
+        </p:nvSpPr>
+        <p:spPr>
+          <a:xfrm>
+            <a:off x="7265194" y="3507579"/>
+            <a:ext cx="3976211" cy="451485"/>
+          </a:xfrm>
+          <a:prstGeom prst="rect">
+            <a:avLst/>
+          </a:prstGeom>
+          <a:solidFill>
+            <a:schemeClr val="accent5">
+              <a:lumMod val="20000"/>
+              <a:lumOff val="80000"/>
+            </a:schemeClr>
+          </a:solidFill>
+          <a:ln/>
+        </p:spPr>
+        <p:txBody>
+          <a:bodyPr wrap="square" rtlCol="0" anchor="ctr"/>
+          <a:lstStyle/>
+          <a:p>
+            <a:pPr algn="ctr">
+              <a:lnSpc>
+                <a:spcPct val="105000"/>
+              </a:lnSpc>
+              <a:spcAft>
+                <a:spcPts val="1000"/>
+              </a:spcAft>
+              <a:buSzPct val="100000"/>
+            </a:pPr>
+            <a:r>
+              <a:rPr lang="ko-KR" altLang="en-US" sz="1600" dirty="0">
+                <a:solidFill>
+                  <a:schemeClr val="tx1"/>
+                </a:solidFill>
+                <a:latin typeface="Pretendard" pitchFamily="34" charset="0"/>
+                <a:ea typeface="Pretendard" pitchFamily="34" charset="-122"/>
+                <a:cs typeface="Pretendard" pitchFamily="34" charset="-120"/>
+              </a:rPr>
+              <a:t>예제 </a:t>
+            </a:r>
+            <a:r>
+              <a:rPr lang="ko-KR" altLang="en-US" sz="1600" dirty="0">
+                <a:latin typeface="Pretendard" pitchFamily="34" charset="0"/>
+                <a:ea typeface="Pretendard" pitchFamily="34" charset="-122"/>
+                <a:cs typeface="Pretendard" pitchFamily="34" charset="-120"/>
+              </a:rPr>
+              <a:t>보기</a:t>
+            </a:r>
+            <a:endParaRPr lang="ko-KR" altLang="en-US" sz="1600" dirty="0">
+              <a:solidFill>
+                <a:schemeClr val="tx1"/>
+              </a:solidFill>
               <a:latin typeface="Pretendard" pitchFamily="34" charset="0"/>
               <a:ea typeface="Pretendard" pitchFamily="34" charset="-122"/>
               <a:cs typeface="Pretendard" pitchFamily="34" charset="-120"/>

--- a/decks/02-connectors-routines/2회차-커넥터-루틴-ComputerUse.pptx
+++ b/decks/02-connectors-routines/2회차-커넥터-루틴-ComputerUse.pptx
@@ -380,7 +380,15 @@
           <a:p>
             <a:r>
               <a:rPr lang="en-US" dirty="0"/>
-              <a:t>3원칙(데이터 격리·최소권한·사람 최종 승인)을 색상 카드로(패턴 A). ICTK 보안 메시지 집약. 프롬프트 인젝션을 쉬운 말로. 출처: https://code.claude.com/docs/en/permissions , https://code.claude.com/docs/en/mcp , https://code.claude.com/docs/en/desktop</a:t>
+              <a:t>3원칙(데이터 격리·최소권한·사람 최종 승인)을 색상 카드로(패턴 A). </a:t>
+            </a:r>
+            <a:r>
+              <a:rPr lang="ko-KR" altLang="en-US" dirty="0"/>
+              <a:t>자사</a:t>
+            </a:r>
+            <a:r>
+              <a:rPr lang="en-US" dirty="0"/>
+              <a:t> 보안 메시지 집약. 프롬프트 인젝션을 쉬운 말로. 출처: https://code.claude.com/docs/en/permissions , https://code.claude.com/docs/en/mcp , https://code.claude.com/docs/en/desktop</a:t>
             </a:r>
           </a:p>
         </p:txBody>
@@ -926,7 +934,15 @@
           <a:p>
             <a:r>
               <a:rPr lang="en-US" dirty="0"/>
-              <a:t>활용 예시를 비개발자 친화(지도·캘린더·메신저)로, GitHub는 개발 직군 보조. Gmail/Calendar/MS365는 claude.ai에서 연결해야 Code에 자동 노출. 첫 도구 호출 시 권한 질문 → ICTK 사람 최종 승인 기조와 연결. 출처: https://code.claude.com/docs/en/mcp , https://code.claude.com/docs/en/desktop</a:t>
+              <a:t>활용 예시를 비개발자 친화(지도·캘린더·메신저)로, GitHub는 개발 직군 보조. Gmail/Calendar/MS365는 claude.ai에서 연결해야 Code에 자동 노출. 첫 도구 호출 시 권한 질문 → </a:t>
+            </a:r>
+            <a:r>
+              <a:rPr lang="ko-KR" altLang="en-US" dirty="0"/>
+              <a:t>자사</a:t>
+            </a:r>
+            <a:r>
+              <a:rPr lang="en-US" dirty="0"/>
+              <a:t> 사람 최종 승인 기조와 연결. 출처: https://code.claude.com/docs/en/mcp , https://code.claude.com/docs/en/desktop</a:t>
             </a:r>
           </a:p>
         </p:txBody>
@@ -1346,7 +1362,7 @@
                 <a:ea typeface="Pretendard" pitchFamily="34" charset="-122"/>
                 <a:cs typeface="Pretendard" pitchFamily="34" charset="-120"/>
               </a:rPr>
-              <a:t>ⓒ ICTK · Unicorn — Claude Code 업무 자동화 부트캠프 2회차 · 무단전재 및 배포 금지</a:t>
+              <a:t>ⓒ Unicorn — Claude Code 업무 자동화 부트캠프 2회차 · 무단전재 및 배포 금지</a:t>
             </a:r>
             <a:endParaRPr lang="en-US" sz="1600" dirty="0"/>
           </a:p>
@@ -2040,7 +2056,29 @@
                 <a:ea typeface="Pretendard" pitchFamily="34" charset="-122"/>
                 <a:cs typeface="Pretendard" pitchFamily="34" charset="-120"/>
               </a:rPr>
-              <a:t>대상: ICTK 임직원 (비개발자 포함 입문자)</a:t>
+              <a:t>대상: </a:t>
+            </a:r>
+            <a:r>
+              <a:rPr lang="en-US" sz="1600" dirty="0" err="1">
+                <a:solidFill>
+                  <a:srgbClr val="505060"/>
+                </a:solidFill>
+                <a:latin typeface="Pretendard" pitchFamily="34" charset="0"/>
+                <a:ea typeface="Pretendard" pitchFamily="34" charset="-122"/>
+                <a:cs typeface="Pretendard" pitchFamily="34" charset="-120"/>
+              </a:rPr>
+              <a:t>임직원</a:t>
+            </a:r>
+            <a:r>
+              <a:rPr lang="en-US" sz="1600" dirty="0">
+                <a:solidFill>
+                  <a:srgbClr val="505060"/>
+                </a:solidFill>
+                <a:latin typeface="Pretendard" pitchFamily="34" charset="0"/>
+                <a:ea typeface="Pretendard" pitchFamily="34" charset="-122"/>
+                <a:cs typeface="Pretendard" pitchFamily="34" charset="-120"/>
+              </a:rPr>
+              <a:t> (비개발자 포함 입문자)</a:t>
             </a:r>
             <a:endParaRPr lang="en-US" sz="1600" dirty="0"/>
           </a:p>
@@ -3082,6 +3120,17 @@
               <a:buNone/>
             </a:pPr>
             <a:r>
+              <a:rPr lang="en-US" sz="3200" b="1" dirty="0" err="1">
+                <a:solidFill>
+                  <a:srgbClr val="2C2926"/>
+                </a:solidFill>
+                <a:latin typeface="Pretendard" pitchFamily="34" charset="0"/>
+                <a:ea typeface="Pretendard" pitchFamily="34" charset="-122"/>
+                <a:cs typeface="Pretendard" pitchFamily="34" charset="-120"/>
+              </a:rPr>
+              <a:t>안전</a:t>
+            </a:r>
+            <a:r>
               <a:rPr lang="en-US" sz="3200" b="1" dirty="0">
                 <a:solidFill>
                   <a:srgbClr val="2C2926"/>
@@ -3090,7 +3139,7 @@
                 <a:ea typeface="Pretendard" pitchFamily="34" charset="-122"/>
                 <a:cs typeface="Pretendard" pitchFamily="34" charset="-120"/>
               </a:rPr>
-              <a:t>ICTK 안전 수칙</a:t>
+              <a:t> 수칙</a:t>
             </a:r>
             <a:endParaRPr lang="en-US" sz="3200" dirty="0"/>
           </a:p>
@@ -3192,6 +3241,17 @@
               <a:buNone/>
             </a:pPr>
             <a:r>
+              <a:rPr lang="en-US" sz="1800" b="1" dirty="0" err="1">
+                <a:solidFill>
+                  <a:srgbClr val="2C2926"/>
+                </a:solidFill>
+                <a:latin typeface="Pretendard" pitchFamily="34" charset="0"/>
+                <a:ea typeface="Pretendard" pitchFamily="34" charset="-122"/>
+                <a:cs typeface="Pretendard" pitchFamily="34" charset="-120"/>
+              </a:rPr>
+              <a:t>보안의</a:t>
+            </a:r>
+            <a:r>
               <a:rPr lang="en-US" sz="1800" b="1" dirty="0">
                 <a:solidFill>
                   <a:srgbClr val="2C2926"/>
@@ -3200,7 +3260,7 @@
                 <a:ea typeface="Pretendard" pitchFamily="34" charset="-122"/>
                 <a:cs typeface="Pretendard" pitchFamily="34" charset="-120"/>
               </a:rPr>
-              <a:t>보안 IC(PUF) 기업 ICTK의 자동화 기본기 — 외부 연결·자동 반복에도 흔들리지 않는 3원칙</a:t>
+              <a:t> 자동화 기본기 — 외부 연결·자동 반복에도 흔들리지 않는 3원칙</a:t>
             </a:r>
             <a:endParaRPr lang="en-US" sz="1800" dirty="0"/>
           </a:p>
@@ -9953,33 +10013,6 @@
       </p:grpSpPr>
       <p:sp>
         <p:nvSpPr>
-          <p:cNvPr id="2" name="Shape 0"/>
-          <p:cNvSpPr/>
-          <p:nvPr/>
-        </p:nvSpPr>
-        <p:spPr>
-          <a:xfrm>
-            <a:off x="457200" y="457200"/>
-            <a:ext cx="82296" cy="548640"/>
-          </a:xfrm>
-          <a:prstGeom prst="rect">
-            <a:avLst/>
-          </a:prstGeom>
-          <a:solidFill>
-            <a:srgbClr val="0284C7"/>
-          </a:solidFill>
-          <a:ln/>
-        </p:spPr>
-        <p:txBody>
-          <a:bodyPr/>
-          <a:lstStyle/>
-          <a:p>
-            <a:endParaRPr lang="ko-KR" altLang="en-US"/>
-          </a:p>
-        </p:txBody>
-      </p:sp>
-      <p:sp>
-        <p:nvSpPr>
           <p:cNvPr id="3" name="Text 1"/>
           <p:cNvSpPr/>
           <p:nvPr/>
@@ -11617,33 +11650,6 @@
       </p:grpSpPr>
       <p:sp>
         <p:nvSpPr>
-          <p:cNvPr id="2" name="Shape 0"/>
-          <p:cNvSpPr/>
-          <p:nvPr/>
-        </p:nvSpPr>
-        <p:spPr>
-          <a:xfrm>
-            <a:off x="457200" y="457200"/>
-            <a:ext cx="82296" cy="548640"/>
-          </a:xfrm>
-          <a:prstGeom prst="rect">
-            <a:avLst/>
-          </a:prstGeom>
-          <a:solidFill>
-            <a:srgbClr val="DC2626"/>
-          </a:solidFill>
-          <a:ln/>
-        </p:spPr>
-        <p:txBody>
-          <a:bodyPr/>
-          <a:lstStyle/>
-          <a:p>
-            <a:endParaRPr lang="ko-KR" altLang="en-US"/>
-          </a:p>
-        </p:txBody>
-      </p:sp>
-      <p:sp>
-        <p:nvSpPr>
           <p:cNvPr id="3" name="Text 1"/>
           <p:cNvSpPr/>
           <p:nvPr/>
@@ -12744,33 +12750,6 @@
           <a:chExt cx="0" cy="0"/>
         </a:xfrm>
       </p:grpSpPr>
-      <p:sp>
-        <p:nvSpPr>
-          <p:cNvPr id="2" name="Shape 0"/>
-          <p:cNvSpPr/>
-          <p:nvPr/>
-        </p:nvSpPr>
-        <p:spPr>
-          <a:xfrm>
-            <a:off x="457200" y="457200"/>
-            <a:ext cx="82296" cy="548640"/>
-          </a:xfrm>
-          <a:prstGeom prst="rect">
-            <a:avLst/>
-          </a:prstGeom>
-          <a:solidFill>
-            <a:srgbClr val="7C3AED"/>
-          </a:solidFill>
-          <a:ln/>
-        </p:spPr>
-        <p:txBody>
-          <a:bodyPr/>
-          <a:lstStyle/>
-          <a:p>
-            <a:endParaRPr lang="ko-KR" altLang="en-US"/>
-          </a:p>
-        </p:txBody>
-      </p:sp>
       <p:sp>
         <p:nvSpPr>
           <p:cNvPr id="3" name="Text 1"/>
